--- a/rust-beginner/01 - Installation/01 - original.pptx
+++ b/rust-beginner/01 - Installation/01 - original.pptx
@@ -381,7 +381,7 @@
           <a:p>
             <a:fld id="{066FE93B-C0A8-431F-AA2F-BF32D1BA0DA9}" type="datetimeFigureOut">
               <a:rPr lang="de-DE" smtClean="0"/>
-              <a:t>01.05.2024</a:t>
+              <a:t>21.10.2025</a:t>
             </a:fld>
             <a:endParaRPr lang="de-DE"/>
           </a:p>
@@ -1387,7 +1387,7 @@
           <a:p>
             <a:fld id="{1B86CF29-98CB-41A0-9533-1F69A7269E4E}" type="datetime1">
               <a:rPr lang="de-DE" smtClean="0"/>
-              <a:t>01.05.2024</a:t>
+              <a:t>21.10.2025</a:t>
             </a:fld>
             <a:endParaRPr lang="de-DE"/>
           </a:p>
@@ -2611,7 +2611,7 @@
           <a:p>
             <a:fld id="{A47C6873-5FFD-4CA3-B601-12EDA11E7384}" type="datetime1">
               <a:rPr lang="de-DE" smtClean="0"/>
-              <a:t>01.05.2024</a:t>
+              <a:t>21.10.2025</a:t>
             </a:fld>
             <a:endParaRPr lang="de-DE"/>
           </a:p>
@@ -2768,7 +2768,7 @@
           <a:p>
             <a:fld id="{97C84E54-DB5C-4EF4-8C00-D9DC9CF4CB03}" type="datetime1">
               <a:rPr lang="de-DE" smtClean="0"/>
-              <a:t>01.05.2024</a:t>
+              <a:t>21.10.2025</a:t>
             </a:fld>
             <a:endParaRPr lang="de-DE"/>
           </a:p>
@@ -3861,7 +3861,7 @@
           <a:p>
             <a:fld id="{F110A31F-3378-4745-A8AD-87E81814308C}" type="datetime1">
               <a:rPr lang="de-DE" smtClean="0"/>
-              <a:t>01.05.2024</a:t>
+              <a:t>21.10.2025</a:t>
             </a:fld>
             <a:endParaRPr lang="de-DE"/>
           </a:p>
@@ -4383,7 +4383,7 @@
           <a:p>
             <a:fld id="{3C5A5924-177F-4E13-8F18-BF17D897E27B}" type="datetime1">
               <a:rPr lang="de-DE" smtClean="0"/>
-              <a:t>01.05.2024</a:t>
+              <a:t>21.10.2025</a:t>
             </a:fld>
             <a:endParaRPr lang="de-DE"/>
           </a:p>
@@ -5038,7 +5038,7 @@
           <a:p>
             <a:fld id="{C02F5A9B-9FF8-41D7-88D9-F781DB264A7C}" type="datetime1">
               <a:rPr lang="de-DE" smtClean="0"/>
-              <a:t>01.05.2024</a:t>
+              <a:t>21.10.2025</a:t>
             </a:fld>
             <a:endParaRPr lang="de-DE"/>
           </a:p>
@@ -5427,7 +5427,7 @@
           <a:p>
             <a:fld id="{3156570E-7EF3-4182-BA9D-2A52B45C241A}" type="datetime1">
               <a:rPr lang="de-DE" smtClean="0"/>
-              <a:t>01.05.2024</a:t>
+              <a:t>21.10.2025</a:t>
             </a:fld>
             <a:endParaRPr lang="de-DE"/>
           </a:p>
@@ -5949,7 +5949,7 @@
           <a:p>
             <a:fld id="{F7C1F0D2-5185-4D31-AB2C-73B275E057D2}" type="datetime1">
               <a:rPr lang="de-DE" smtClean="0"/>
-              <a:t>01.05.2024</a:t>
+              <a:t>21.10.2025</a:t>
             </a:fld>
             <a:endParaRPr lang="de-DE"/>
           </a:p>
@@ -7042,7 +7042,7 @@
           <a:p>
             <a:fld id="{D1D978B3-F0C5-4ABC-A255-F5F0962A8D8B}" type="datetime1">
               <a:rPr lang="de-DE" smtClean="0"/>
-              <a:t>01.05.2024</a:t>
+              <a:t>21.10.2025</a:t>
             </a:fld>
             <a:endParaRPr lang="de-DE"/>
           </a:p>
@@ -7724,7 +7724,7 @@
           <a:p>
             <a:fld id="{D8799C66-E9C7-4A80-B57A-E25F3C3939CD}" type="datetime1">
               <a:rPr lang="de-DE" smtClean="0"/>
-              <a:t>01.05.2024</a:t>
+              <a:t>21.10.2025</a:t>
             </a:fld>
             <a:endParaRPr lang="de-DE"/>
           </a:p>
@@ -8032,7 +8032,7 @@
           <a:p>
             <a:fld id="{A986101B-8F49-41C6-B566-F6D80346D6C1}" type="datetime1">
               <a:rPr lang="de-DE" smtClean="0"/>
-              <a:t>01.05.2024</a:t>
+              <a:t>21.10.2025</a:t>
             </a:fld>
             <a:endParaRPr lang="de-DE"/>
           </a:p>
@@ -8800,7 +8800,7 @@
           <a:p>
             <a:fld id="{872B7197-EDBB-45FE-B01B-7EF51F589382}" type="datetime1">
               <a:rPr lang="de-DE" smtClean="0"/>
-              <a:t>01.05.2024</a:t>
+              <a:t>21.10.2025</a:t>
             </a:fld>
             <a:endParaRPr lang="de-DE"/>
           </a:p>
@@ -9784,7 +9784,7 @@
           <a:p>
             <a:fld id="{3C5A5924-177F-4E13-8F18-BF17D897E27B}" type="datetime1">
               <a:rPr lang="de-DE" smtClean="0"/>
-              <a:t>01.05.2024</a:t>
+              <a:t>21.10.2025</a:t>
             </a:fld>
             <a:endParaRPr lang="de-DE"/>
           </a:p>
@@ -9940,7 +9940,7 @@
           <a:p>
             <a:fld id="{3C5A5924-177F-4E13-8F18-BF17D897E27B}" type="datetime1">
               <a:rPr lang="de-DE" smtClean="0"/>
-              <a:t>01.05.2024</a:t>
+              <a:t>21.10.2025</a:t>
             </a:fld>
             <a:endParaRPr lang="de-DE"/>
           </a:p>
@@ -10109,7 +10109,7 @@
           <a:p>
             <a:fld id="{3C5A5924-177F-4E13-8F18-BF17D897E27B}" type="datetime1">
               <a:rPr lang="de-DE" smtClean="0"/>
-              <a:t>01.05.2024</a:t>
+              <a:t>21.10.2025</a:t>
             </a:fld>
             <a:endParaRPr lang="de-DE"/>
           </a:p>
@@ -10356,7 +10356,7 @@
           <a:p>
             <a:fld id="{3C5A5924-177F-4E13-8F18-BF17D897E27B}" type="datetime1">
               <a:rPr lang="de-DE" smtClean="0"/>
-              <a:t>01.05.2024</a:t>
+              <a:t>21.10.2025</a:t>
             </a:fld>
             <a:endParaRPr lang="de-DE"/>
           </a:p>
@@ -10591,7 +10591,7 @@
           <a:p>
             <a:fld id="{3C5A5924-177F-4E13-8F18-BF17D897E27B}" type="datetime1">
               <a:rPr lang="de-DE" smtClean="0"/>
-              <a:t>01.05.2024</a:t>
+              <a:t>21.10.2025</a:t>
             </a:fld>
             <a:endParaRPr lang="de-DE"/>
           </a:p>
@@ -10767,7 +10767,7 @@
           <a:p>
             <a:fld id="{3C5A5924-177F-4E13-8F18-BF17D897E27B}" type="datetime1">
               <a:rPr lang="de-DE" smtClean="0"/>
-              <a:t>01.05.2024</a:t>
+              <a:t>21.10.2025</a:t>
             </a:fld>
             <a:endParaRPr lang="de-DE"/>
           </a:p>
@@ -10990,7 +10990,7 @@
           <a:p>
             <a:fld id="{3C5A5924-177F-4E13-8F18-BF17D897E27B}" type="datetime1">
               <a:rPr lang="de-DE" smtClean="0"/>
-              <a:t>01.05.2024</a:t>
+              <a:t>21.10.2025</a:t>
             </a:fld>
             <a:endParaRPr lang="de-DE"/>
           </a:p>
@@ -11242,7 +11242,7 @@
           <a:p>
             <a:fld id="{3C5A5924-177F-4E13-8F18-BF17D897E27B}" type="datetime1">
               <a:rPr lang="de-DE" smtClean="0"/>
-              <a:t>01.05.2024</a:t>
+              <a:t>21.10.2025</a:t>
             </a:fld>
             <a:endParaRPr lang="de-DE"/>
           </a:p>
@@ -11472,7 +11472,7 @@
           <a:p>
             <a:fld id="{3C5A5924-177F-4E13-8F18-BF17D897E27B}" type="datetime1">
               <a:rPr lang="de-DE" smtClean="0"/>
-              <a:t>01.05.2024</a:t>
+              <a:t>21.10.2025</a:t>
             </a:fld>
             <a:endParaRPr lang="de-DE"/>
           </a:p>
@@ -11741,7 +11741,7 @@
           <a:p>
             <a:fld id="{3C5A5924-177F-4E13-8F18-BF17D897E27B}" type="datetime1">
               <a:rPr lang="de-DE" smtClean="0"/>
-              <a:t>01.05.2024</a:t>
+              <a:t>21.10.2025</a:t>
             </a:fld>
             <a:endParaRPr lang="de-DE"/>
           </a:p>
@@ -11856,7 +11856,7 @@
           <a:p>
             <a:fld id="{5B1852AE-BE14-403F-948A-24D6C5188DC7}" type="datetime1">
               <a:rPr lang="de-DE" smtClean="0"/>
-              <a:t>01.05.2024</a:t>
+              <a:t>21.10.2025</a:t>
             </a:fld>
             <a:endParaRPr lang="de-DE"/>
           </a:p>
@@ -12084,7 +12084,7 @@
           <a:p>
             <a:fld id="{3C5A5924-177F-4E13-8F18-BF17D897E27B}" type="datetime1">
               <a:rPr lang="de-DE" smtClean="0"/>
-              <a:t>01.05.2024</a:t>
+              <a:t>21.10.2025</a:t>
             </a:fld>
             <a:endParaRPr lang="de-DE"/>
           </a:p>
@@ -12380,7 +12380,7 @@
           <a:p>
             <a:fld id="{3C5A5924-177F-4E13-8F18-BF17D897E27B}" type="datetime1">
               <a:rPr lang="de-DE" smtClean="0"/>
-              <a:t>01.05.2024</a:t>
+              <a:t>21.10.2025</a:t>
             </a:fld>
             <a:endParaRPr lang="de-DE"/>
           </a:p>
@@ -12667,7 +12667,7 @@
           <a:p>
             <a:fld id="{3C5A5924-177F-4E13-8F18-BF17D897E27B}" type="datetime1">
               <a:rPr lang="de-DE" smtClean="0"/>
-              <a:t>01.05.2024</a:t>
+              <a:t>21.10.2025</a:t>
             </a:fld>
             <a:endParaRPr lang="de-DE"/>
           </a:p>
@@ -12814,7 +12814,7 @@
           <a:p>
             <a:fld id="{3C5A5924-177F-4E13-8F18-BF17D897E27B}" type="datetime1">
               <a:rPr lang="de-DE" smtClean="0"/>
-              <a:t>01.05.2024</a:t>
+              <a:t>21.10.2025</a:t>
             </a:fld>
             <a:endParaRPr lang="de-DE"/>
           </a:p>
@@ -13181,7 +13181,7 @@
           <a:p>
             <a:fld id="{3C5A5924-177F-4E13-8F18-BF17D897E27B}" type="datetime1">
               <a:rPr lang="de-DE" smtClean="0"/>
-              <a:t>01.05.2024</a:t>
+              <a:t>21.10.2025</a:t>
             </a:fld>
             <a:endParaRPr lang="de-DE"/>
           </a:p>
@@ -13430,7 +13430,7 @@
           <a:p>
             <a:fld id="{3C5A5924-177F-4E13-8F18-BF17D897E27B}" type="datetime1">
               <a:rPr lang="de-DE" smtClean="0"/>
-              <a:t>01.05.2024</a:t>
+              <a:t>21.10.2025</a:t>
             </a:fld>
             <a:endParaRPr lang="de-DE"/>
           </a:p>
@@ -13776,7 +13776,7 @@
           <a:p>
             <a:fld id="{C02F5A9B-9FF8-41D7-88D9-F781DB264A7C}" type="datetime1">
               <a:rPr lang="de-DE" smtClean="0"/>
-              <a:t>01.05.2024</a:t>
+              <a:t>21.10.2025</a:t>
             </a:fld>
             <a:endParaRPr lang="de-DE"/>
           </a:p>
@@ -13957,7 +13957,7 @@
           <a:p>
             <a:fld id="{C02F5A9B-9FF8-41D7-88D9-F781DB264A7C}" type="datetime1">
               <a:rPr lang="de-DE" smtClean="0"/>
-              <a:t>01.05.2024</a:t>
+              <a:t>21.10.2025</a:t>
             </a:fld>
             <a:endParaRPr lang="de-DE"/>
           </a:p>
@@ -14307,7 +14307,7 @@
           <a:p>
             <a:fld id="{C02F5A9B-9FF8-41D7-88D9-F781DB264A7C}" type="datetime1">
               <a:rPr lang="de-DE" smtClean="0"/>
-              <a:t>01.05.2024</a:t>
+              <a:t>21.10.2025</a:t>
             </a:fld>
             <a:endParaRPr lang="de-DE"/>
           </a:p>
@@ -14594,7 +14594,7 @@
           <a:p>
             <a:fld id="{C02F5A9B-9FF8-41D7-88D9-F781DB264A7C}" type="datetime1">
               <a:rPr lang="de-DE" smtClean="0"/>
-              <a:t>01.05.2024</a:t>
+              <a:t>21.10.2025</a:t>
             </a:fld>
             <a:endParaRPr lang="de-DE"/>
           </a:p>
@@ -14741,7 +14741,7 @@
           <a:p>
             <a:fld id="{5B1852AE-BE14-403F-948A-24D6C5188DC7}" type="datetime1">
               <a:rPr lang="de-DE" smtClean="0"/>
-              <a:t>01.05.2024</a:t>
+              <a:t>21.10.2025</a:t>
             </a:fld>
             <a:endParaRPr lang="de-DE"/>
           </a:p>
@@ -14892,7 +14892,7 @@
           <a:p>
             <a:fld id="{C02F5A9B-9FF8-41D7-88D9-F781DB264A7C}" type="datetime1">
               <a:rPr lang="de-DE" smtClean="0"/>
-              <a:t>01.05.2024</a:t>
+              <a:t>21.10.2025</a:t>
             </a:fld>
             <a:endParaRPr lang="de-DE"/>
           </a:p>
@@ -15055,7 +15055,7 @@
           <a:p>
             <a:fld id="{C02F5A9B-9FF8-41D7-88D9-F781DB264A7C}" type="datetime1">
               <a:rPr lang="de-DE" smtClean="0"/>
-              <a:t>01.05.2024</a:t>
+              <a:t>21.10.2025</a:t>
             </a:fld>
             <a:endParaRPr lang="de-DE"/>
           </a:p>
@@ -15247,18 +15247,19 @@
             </a:pPr>
             <a:r>
               <a:rPr lang="en-US" dirty="0"/>
-              <a:t>Visual Studio Code </a:t>
-            </a:r>
-            <a:r>
-              <a:rPr lang="en-US" dirty="0">
+              <a:t>Visual Studio </a:t>
+            </a:r>
+            <a:r>
+              <a:rPr lang="en-US"/>
+              <a:t>Code </a:t>
+            </a:r>
+            <a:r>
+              <a:rPr lang="en-US">
                 <a:sym typeface="Wingdings" panose="05000000000000000000" pitchFamily="2" charset="2"/>
               </a:rPr>
-              <a:t> </a:t>
-            </a:r>
-            <a:r>
-              <a:rPr lang="en-US" dirty="0"/>
-              <a:t>What I’ll be using</a:t>
-            </a:r>
+              <a:t> Jack of all trades, also good for other languages</a:t>
+            </a:r>
+            <a:endParaRPr lang="en-US" dirty="0"/>
           </a:p>
         </p:txBody>
       </p:sp>
@@ -15285,7 +15286,7 @@
           <a:p>
             <a:fld id="{C02F5A9B-9FF8-41D7-88D9-F781DB264A7C}" type="datetime1">
               <a:rPr lang="de-DE" smtClean="0"/>
-              <a:t>01.05.2024</a:t>
+              <a:t>21.10.2025</a:t>
             </a:fld>
             <a:endParaRPr lang="de-DE"/>
           </a:p>
@@ -15562,7 +15563,7 @@
           <a:p>
             <a:fld id="{C02F5A9B-9FF8-41D7-88D9-F781DB264A7C}" type="datetime1">
               <a:rPr lang="de-DE" smtClean="0"/>
-              <a:t>01.05.2024</a:t>
+              <a:t>21.10.2025</a:t>
             </a:fld>
             <a:endParaRPr lang="de-DE"/>
           </a:p>
@@ -15734,7 +15735,7 @@
           <a:p>
             <a:fld id="{C02F5A9B-9FF8-41D7-88D9-F781DB264A7C}" type="datetime1">
               <a:rPr lang="de-DE" smtClean="0"/>
-              <a:t>01.05.2024</a:t>
+              <a:t>21.10.2025</a:t>
             </a:fld>
             <a:endParaRPr lang="de-DE"/>
           </a:p>
@@ -15853,7 +15854,7 @@
           <a:p>
             <a:fld id="{C02F5A9B-9FF8-41D7-88D9-F781DB264A7C}" type="datetime1">
               <a:rPr lang="de-DE" smtClean="0"/>
-              <a:t>01.05.2024</a:t>
+              <a:t>21.10.2025</a:t>
             </a:fld>
             <a:endParaRPr lang="de-DE"/>
           </a:p>
@@ -16002,7 +16003,7 @@
           <a:p>
             <a:fld id="{C02F5A9B-9FF8-41D7-88D9-F781DB264A7C}" type="datetime1">
               <a:rPr lang="de-DE" smtClean="0"/>
-              <a:t>01.05.2024</a:t>
+              <a:t>21.10.2025</a:t>
             </a:fld>
             <a:endParaRPr lang="de-DE"/>
           </a:p>
@@ -16242,7 +16243,7 @@
           <a:p>
             <a:fld id="{C02F5A9B-9FF8-41D7-88D9-F781DB264A7C}" type="datetime1">
               <a:rPr lang="de-DE" smtClean="0"/>
-              <a:t>01.05.2024</a:t>
+              <a:t>21.10.2025</a:t>
             </a:fld>
             <a:endParaRPr lang="de-DE"/>
           </a:p>
@@ -16482,7 +16483,7 @@
           <a:p>
             <a:fld id="{C02F5A9B-9FF8-41D7-88D9-F781DB264A7C}" type="datetime1">
               <a:rPr lang="de-DE" smtClean="0"/>
-              <a:t>01.05.2024</a:t>
+              <a:t>21.10.2025</a:t>
             </a:fld>
             <a:endParaRPr lang="de-DE"/>
           </a:p>
@@ -16722,7 +16723,7 @@
           <a:p>
             <a:fld id="{C02F5A9B-9FF8-41D7-88D9-F781DB264A7C}" type="datetime1">
               <a:rPr lang="de-DE" smtClean="0"/>
-              <a:t>01.05.2024</a:t>
+              <a:t>21.10.2025</a:t>
             </a:fld>
             <a:endParaRPr lang="de-DE"/>
           </a:p>
@@ -17000,7 +17001,7 @@
           <a:p>
             <a:fld id="{5B1852AE-BE14-403F-948A-24D6C5188DC7}" type="datetime1">
               <a:rPr lang="de-DE" smtClean="0"/>
-              <a:t>01.05.2024</a:t>
+              <a:t>21.10.2025</a:t>
             </a:fld>
             <a:endParaRPr lang="de-DE"/>
           </a:p>
@@ -17119,7 +17120,7 @@
           <a:p>
             <a:fld id="{C02F5A9B-9FF8-41D7-88D9-F781DB264A7C}" type="datetime1">
               <a:rPr lang="de-DE" smtClean="0"/>
-              <a:t>01.05.2024</a:t>
+              <a:t>21.10.2025</a:t>
             </a:fld>
             <a:endParaRPr lang="de-DE"/>
           </a:p>
@@ -17369,7 +17370,7 @@
           <a:p>
             <a:fld id="{3156570E-7EF3-4182-BA9D-2A52B45C241A}" type="datetime1">
               <a:rPr lang="de-DE" smtClean="0"/>
-              <a:t>01.05.2024</a:t>
+              <a:t>21.10.2025</a:t>
             </a:fld>
             <a:endParaRPr lang="de-DE"/>
           </a:p>
@@ -17518,7 +17519,7 @@
           <a:p>
             <a:fld id="{3156570E-7EF3-4182-BA9D-2A52B45C241A}" type="datetime1">
               <a:rPr lang="de-DE" smtClean="0"/>
-              <a:t>01.05.2024</a:t>
+              <a:t>21.10.2025</a:t>
             </a:fld>
             <a:endParaRPr lang="de-DE"/>
           </a:p>
@@ -17758,7 +17759,7 @@
           <a:p>
             <a:fld id="{3156570E-7EF3-4182-BA9D-2A52B45C241A}" type="datetime1">
               <a:rPr lang="de-DE" smtClean="0"/>
-              <a:t>01.05.2024</a:t>
+              <a:t>21.10.2025</a:t>
             </a:fld>
             <a:endParaRPr lang="de-DE"/>
           </a:p>
@@ -17998,7 +17999,7 @@
           <a:p>
             <a:fld id="{3156570E-7EF3-4182-BA9D-2A52B45C241A}" type="datetime1">
               <a:rPr lang="de-DE" smtClean="0"/>
-              <a:t>01.05.2024</a:t>
+              <a:t>21.10.2025</a:t>
             </a:fld>
             <a:endParaRPr lang="de-DE"/>
           </a:p>
@@ -18270,7 +18271,7 @@
           <a:p>
             <a:fld id="{3156570E-7EF3-4182-BA9D-2A52B45C241A}" type="datetime1">
               <a:rPr lang="de-DE" smtClean="0"/>
-              <a:t>01.05.2024</a:t>
+              <a:t>21.10.2025</a:t>
             </a:fld>
             <a:endParaRPr lang="de-DE"/>
           </a:p>
@@ -18444,8 +18445,13 @@
             </a:pPr>
             <a:r>
               <a:rPr lang="de-DE" dirty="0"/>
-              <a:t>Because I am still changing slides, regular updates are recommended</a:t>
-            </a:r>
+              <a:t>Because I am still changing slides, regular updates </a:t>
+            </a:r>
+            <a:r>
+              <a:rPr lang="de-DE"/>
+              <a:t>are recommended</a:t>
+            </a:r>
+            <a:endParaRPr lang="de-DE" dirty="0"/>
           </a:p>
           <a:p>
             <a:pPr lvl="1">
@@ -18624,7 +18630,7 @@
           <a:p>
             <a:fld id="{3156570E-7EF3-4182-BA9D-2A52B45C241A}" type="datetime1">
               <a:rPr lang="de-DE" smtClean="0"/>
-              <a:t>01.05.2024</a:t>
+              <a:t>21.10.2025</a:t>
             </a:fld>
             <a:endParaRPr lang="de-DE"/>
           </a:p>
@@ -18836,7 +18842,7 @@
           <a:p>
             <a:fld id="{3156570E-7EF3-4182-BA9D-2A52B45C241A}" type="datetime1">
               <a:rPr lang="de-DE" smtClean="0"/>
-              <a:t>01.05.2024</a:t>
+              <a:t>21.10.2025</a:t>
             </a:fld>
             <a:endParaRPr lang="de-DE"/>
           </a:p>
@@ -19146,7 +19152,7 @@
           <a:p>
             <a:fld id="{3156570E-7EF3-4182-BA9D-2A52B45C241A}" type="datetime1">
               <a:rPr lang="de-DE" smtClean="0"/>
-              <a:t>01.05.2024</a:t>
+              <a:t>21.10.2025</a:t>
             </a:fld>
             <a:endParaRPr lang="de-DE"/>
           </a:p>
@@ -19404,7 +19410,7 @@
           <a:p>
             <a:fld id="{3156570E-7EF3-4182-BA9D-2A52B45C241A}" type="datetime1">
               <a:rPr lang="de-DE" smtClean="0"/>
-              <a:t>01.05.2024</a:t>
+              <a:t>21.10.2025</a:t>
             </a:fld>
             <a:endParaRPr lang="de-DE"/>
           </a:p>
@@ -19571,7 +19577,7 @@
           <a:p>
             <a:fld id="{5B1852AE-BE14-403F-948A-24D6C5188DC7}" type="datetime1">
               <a:rPr lang="de-DE" smtClean="0"/>
-              <a:t>01.05.2024</a:t>
+              <a:t>21.10.2025</a:t>
             </a:fld>
             <a:endParaRPr lang="de-DE"/>
           </a:p>
@@ -19796,8 +19802,35 @@
                   <a:schemeClr val="bg1"/>
                 </a:solidFill>
               </a:rPr>
-              <a:t>Basic program stands, but my goal is to teach you Rust the best I can</a:t>
-            </a:r>
+              <a:t>Basic program stands, but my goal is to teach you Rust the best </a:t>
+            </a:r>
+            <a:r>
+              <a:rPr lang="de-DE">
+                <a:solidFill>
+                  <a:schemeClr val="bg1"/>
+                </a:solidFill>
+              </a:rPr>
+              <a:t>I can</a:t>
+            </a:r>
+          </a:p>
+          <a:p>
+            <a:pPr lvl="2">
+              <a:buFont typeface="Symbol" panose="05050102010706020507" pitchFamily="18" charset="2"/>
+              <a:buChar char="-"/>
+            </a:pPr>
+            <a:r>
+              <a:rPr lang="de-DE">
+                <a:solidFill>
+                  <a:schemeClr val="bg1"/>
+                </a:solidFill>
+              </a:rPr>
+              <a:t>Slides are a rough guideline, we have enough time to talk about anything you don‘t understand</a:t>
+            </a:r>
+            <a:endParaRPr lang="de-DE" dirty="0">
+              <a:solidFill>
+                <a:schemeClr val="bg1"/>
+              </a:solidFill>
+            </a:endParaRPr>
           </a:p>
           <a:p>
             <a:pPr lvl="1">
@@ -19866,7 +19899,7 @@
           <a:p>
             <a:fld id="{3156570E-7EF3-4182-BA9D-2A52B45C241A}" type="datetime1">
               <a:rPr lang="de-DE" smtClean="0"/>
-              <a:t>01.05.2024</a:t>
+              <a:t>21.10.2025</a:t>
             </a:fld>
             <a:endParaRPr lang="de-DE"/>
           </a:p>
@@ -20100,7 +20133,7 @@
           <a:p>
             <a:fld id="{3156570E-7EF3-4182-BA9D-2A52B45C241A}" type="datetime1">
               <a:rPr lang="de-DE" smtClean="0"/>
-              <a:t>01.05.2024</a:t>
+              <a:t>21.10.2025</a:t>
             </a:fld>
             <a:endParaRPr lang="de-DE"/>
           </a:p>
@@ -20277,7 +20310,7 @@
           <a:p>
             <a:fld id="{5B1852AE-BE14-403F-948A-24D6C5188DC7}" type="datetime1">
               <a:rPr lang="de-DE" smtClean="0"/>
-              <a:t>01.05.2024</a:t>
+              <a:t>21.10.2025</a:t>
             </a:fld>
             <a:endParaRPr lang="de-DE"/>
           </a:p>
@@ -20428,7 +20461,7 @@
           <a:p>
             <a:fld id="{3C5A5924-177F-4E13-8F18-BF17D897E27B}" type="datetime1">
               <a:rPr lang="de-DE" smtClean="0"/>
-              <a:t>01.05.2024</a:t>
+              <a:t>21.10.2025</a:t>
             </a:fld>
             <a:endParaRPr lang="de-DE"/>
           </a:p>
@@ -20589,7 +20622,7 @@
           <a:p>
             <a:fld id="{3C5A5924-177F-4E13-8F18-BF17D897E27B}" type="datetime1">
               <a:rPr lang="de-DE" smtClean="0"/>
-              <a:t>01.05.2024</a:t>
+              <a:t>21.10.2025</a:t>
             </a:fld>
             <a:endParaRPr lang="de-DE"/>
           </a:p>
@@ -20790,7 +20823,7 @@
           <a:p>
             <a:fld id="{3C5A5924-177F-4E13-8F18-BF17D897E27B}" type="datetime1">
               <a:rPr lang="de-DE" smtClean="0"/>
-              <a:t>01.05.2024</a:t>
+              <a:t>21.10.2025</a:t>
             </a:fld>
             <a:endParaRPr lang="de-DE"/>
           </a:p>

--- a/rust-beginner/01 - Installation/01 - original.pptx
+++ b/rust-beginner/01 - Installation/01 - original.pptx
@@ -5,7 +5,7 @@
     <p:sldMasterId id="2147483684" r:id="rId1"/>
   </p:sldMasterIdLst>
   <p:notesMasterIdLst>
-    <p:notesMasterId r:id="rId53"/>
+    <p:notesMasterId r:id="rId57"/>
   </p:notesMasterIdLst>
   <p:sldIdLst>
     <p:sldId id="257" r:id="rId2"/>
@@ -58,7 +58,11 @@
     <p:sldId id="426" r:id="rId49"/>
     <p:sldId id="427" r:id="rId50"/>
     <p:sldId id="428" r:id="rId51"/>
-    <p:sldId id="429" r:id="rId52"/>
+    <p:sldId id="430" r:id="rId52"/>
+    <p:sldId id="431" r:id="rId53"/>
+    <p:sldId id="432" r:id="rId54"/>
+    <p:sldId id="434" r:id="rId55"/>
+    <p:sldId id="429" r:id="rId56"/>
   </p:sldIdLst>
   <p:sldSz cx="12192000" cy="6858000"/>
   <p:notesSz cx="6858000" cy="9144000"/>
@@ -19951,6 +19955,1053 @@
   <p:cSld>
     <p:spTree>
       <p:nvGrpSpPr>
+        <p:cNvPr id="1" name="">
+          <a:extLst>
+            <a:ext uri="{FF2B5EF4-FFF2-40B4-BE49-F238E27FC236}">
+              <a16:creationId xmlns:a16="http://schemas.microsoft.com/office/drawing/2014/main" id="{DAFD2321-F2F5-6C42-855A-6A9D3C56B7C4}"/>
+            </a:ext>
+          </a:extLst>
+        </p:cNvPr>
+        <p:cNvGrpSpPr/>
+        <p:nvPr/>
+      </p:nvGrpSpPr>
+      <p:grpSpPr>
+        <a:xfrm>
+          <a:off x="0" y="0"/>
+          <a:ext cx="0" cy="0"/>
+          <a:chOff x="0" y="0"/>
+          <a:chExt cx="0" cy="0"/>
+        </a:xfrm>
+      </p:grpSpPr>
+      <p:sp>
+        <p:nvSpPr>
+          <p:cNvPr id="5" name="Title 4">
+            <a:extLst>
+              <a:ext uri="{FF2B5EF4-FFF2-40B4-BE49-F238E27FC236}">
+                <a16:creationId xmlns:a16="http://schemas.microsoft.com/office/drawing/2014/main" id="{9C28AE6D-7CDB-234C-DE29-AC2AB7312C60}"/>
+              </a:ext>
+            </a:extLst>
+          </p:cNvPr>
+          <p:cNvSpPr>
+            <a:spLocks noGrp="1"/>
+          </p:cNvSpPr>
+          <p:nvPr>
+            <p:ph type="title"/>
+          </p:nvPr>
+        </p:nvSpPr>
+        <p:spPr/>
+        <p:txBody>
+          <a:bodyPr/>
+          <a:lstStyle/>
+          <a:p>
+            <a:r>
+              <a:rPr lang="de-DE"/>
+              <a:t>Intermission – Intermissions</a:t>
+            </a:r>
+            <a:endParaRPr lang="de-DE" dirty="0"/>
+          </a:p>
+        </p:txBody>
+      </p:sp>
+      <p:sp>
+        <p:nvSpPr>
+          <p:cNvPr id="6" name="Text Placeholder 5">
+            <a:extLst>
+              <a:ext uri="{FF2B5EF4-FFF2-40B4-BE49-F238E27FC236}">
+                <a16:creationId xmlns:a16="http://schemas.microsoft.com/office/drawing/2014/main" id="{C080DBA8-35C5-2AE8-4DAD-59C4F36A8370}"/>
+              </a:ext>
+            </a:extLst>
+          </p:cNvPr>
+          <p:cNvSpPr>
+            <a:spLocks noGrp="1"/>
+          </p:cNvSpPr>
+          <p:nvPr>
+            <p:ph type="body" idx="1"/>
+          </p:nvPr>
+        </p:nvSpPr>
+        <p:spPr/>
+        <p:txBody>
+          <a:bodyPr/>
+          <a:lstStyle/>
+          <a:p>
+            <a:pPr marL="194729" indent="0">
+              <a:buNone/>
+            </a:pPr>
+            <a:endParaRPr lang="de-DE" dirty="0">
+              <a:solidFill>
+                <a:schemeClr val="bg1"/>
+              </a:solidFill>
+            </a:endParaRPr>
+          </a:p>
+        </p:txBody>
+      </p:sp>
+      <p:sp>
+        <p:nvSpPr>
+          <p:cNvPr id="3" name="Date Placeholder 2">
+            <a:extLst>
+              <a:ext uri="{FF2B5EF4-FFF2-40B4-BE49-F238E27FC236}">
+                <a16:creationId xmlns:a16="http://schemas.microsoft.com/office/drawing/2014/main" id="{5E2D6EE6-5710-B0F3-4C0A-870E6DC919C0}"/>
+              </a:ext>
+            </a:extLst>
+          </p:cNvPr>
+          <p:cNvSpPr>
+            <a:spLocks noGrp="1"/>
+          </p:cNvSpPr>
+          <p:nvPr>
+            <p:ph type="dt" sz="half" idx="13"/>
+          </p:nvPr>
+        </p:nvSpPr>
+        <p:spPr/>
+        <p:txBody>
+          <a:bodyPr/>
+          <a:lstStyle/>
+          <a:p>
+            <a:fld id="{3156570E-7EF3-4182-BA9D-2A52B45C241A}" type="datetime1">
+              <a:rPr lang="de-DE" smtClean="0"/>
+              <a:t>21.10.2025</a:t>
+            </a:fld>
+            <a:endParaRPr lang="de-DE"/>
+          </a:p>
+        </p:txBody>
+      </p:sp>
+      <p:sp>
+        <p:nvSpPr>
+          <p:cNvPr id="4" name="Footer Placeholder 3">
+            <a:extLst>
+              <a:ext uri="{FF2B5EF4-FFF2-40B4-BE49-F238E27FC236}">
+                <a16:creationId xmlns:a16="http://schemas.microsoft.com/office/drawing/2014/main" id="{E38A339B-C471-D40B-5074-67BF0ABE830B}"/>
+              </a:ext>
+            </a:extLst>
+          </p:cNvPr>
+          <p:cNvSpPr>
+            <a:spLocks noGrp="1"/>
+          </p:cNvSpPr>
+          <p:nvPr>
+            <p:ph type="ftr" sz="quarter" idx="14"/>
+          </p:nvPr>
+        </p:nvSpPr>
+        <p:spPr/>
+        <p:txBody>
+          <a:bodyPr/>
+          <a:lstStyle/>
+          <a:p>
+            <a:r>
+              <a:rPr lang="de-DE"/>
+              <a:t>RUSTikales Rust for beginners</a:t>
+            </a:r>
+          </a:p>
+        </p:txBody>
+      </p:sp>
+    </p:spTree>
+    <p:extLst>
+      <p:ext uri="{BB962C8B-B14F-4D97-AF65-F5344CB8AC3E}">
+        <p14:creationId xmlns:p14="http://schemas.microsoft.com/office/powerpoint/2010/main" val="1859693267"/>
+      </p:ext>
+    </p:extLst>
+  </p:cSld>
+  <p:clrMapOvr>
+    <a:masterClrMapping/>
+  </p:clrMapOvr>
+</p:sld>
+</file>
+
+<file path=ppt/slides/slide52.xml><?xml version="1.0" encoding="utf-8"?>
+<p:sld xmlns:a="http://schemas.openxmlformats.org/drawingml/2006/main" xmlns:r="http://schemas.openxmlformats.org/officeDocument/2006/relationships" xmlns:p="http://schemas.openxmlformats.org/presentationml/2006/main">
+  <p:cSld>
+    <p:spTree>
+      <p:nvGrpSpPr>
+        <p:cNvPr id="1" name="">
+          <a:extLst>
+            <a:ext uri="{FF2B5EF4-FFF2-40B4-BE49-F238E27FC236}">
+              <a16:creationId xmlns:a16="http://schemas.microsoft.com/office/drawing/2014/main" id="{2F409326-10F7-117F-BF2C-8F96F89455A4}"/>
+            </a:ext>
+          </a:extLst>
+        </p:cNvPr>
+        <p:cNvGrpSpPr/>
+        <p:nvPr/>
+      </p:nvGrpSpPr>
+      <p:grpSpPr>
+        <a:xfrm>
+          <a:off x="0" y="0"/>
+          <a:ext cx="0" cy="0"/>
+          <a:chOff x="0" y="0"/>
+          <a:chExt cx="0" cy="0"/>
+        </a:xfrm>
+      </p:grpSpPr>
+      <p:sp>
+        <p:nvSpPr>
+          <p:cNvPr id="5" name="Title 4">
+            <a:extLst>
+              <a:ext uri="{FF2B5EF4-FFF2-40B4-BE49-F238E27FC236}">
+                <a16:creationId xmlns:a16="http://schemas.microsoft.com/office/drawing/2014/main" id="{2EAE829B-7239-F0AC-1D3D-C17A07F2CB44}"/>
+              </a:ext>
+            </a:extLst>
+          </p:cNvPr>
+          <p:cNvSpPr>
+            <a:spLocks noGrp="1"/>
+          </p:cNvSpPr>
+          <p:nvPr>
+            <p:ph type="title"/>
+          </p:nvPr>
+        </p:nvSpPr>
+        <p:spPr/>
+        <p:txBody>
+          <a:bodyPr/>
+          <a:lstStyle/>
+          <a:p>
+            <a:r>
+              <a:rPr lang="de-DE"/>
+              <a:t>Intermission – Intermissions</a:t>
+            </a:r>
+            <a:endParaRPr lang="de-DE" dirty="0"/>
+          </a:p>
+        </p:txBody>
+      </p:sp>
+      <p:sp>
+        <p:nvSpPr>
+          <p:cNvPr id="2" name="Text Placeholder 1">
+            <a:extLst>
+              <a:ext uri="{FF2B5EF4-FFF2-40B4-BE49-F238E27FC236}">
+                <a16:creationId xmlns:a16="http://schemas.microsoft.com/office/drawing/2014/main" id="{F28E5E8F-DF70-EF26-AD52-0BADDCFFBD4C}"/>
+              </a:ext>
+            </a:extLst>
+          </p:cNvPr>
+          <p:cNvSpPr>
+            <a:spLocks noGrp="1"/>
+          </p:cNvSpPr>
+          <p:nvPr>
+            <p:ph type="body" idx="1"/>
+          </p:nvPr>
+        </p:nvSpPr>
+        <p:spPr/>
+        <p:txBody>
+          <a:bodyPr/>
+          <a:lstStyle/>
+          <a:p>
+            <a:pPr>
+              <a:buFont typeface="Symbol" panose="05050102010706020507" pitchFamily="18" charset="2"/>
+              <a:buChar char="-"/>
+            </a:pPr>
+            <a:r>
+              <a:rPr lang="de-DE"/>
+              <a:t>Rust is a system programming language</a:t>
+            </a:r>
+          </a:p>
+          <a:p>
+            <a:pPr lvl="1">
+              <a:buFont typeface="Symbol" panose="05050102010706020507" pitchFamily="18" charset="2"/>
+              <a:buChar char="-"/>
+            </a:pPr>
+            <a:r>
+              <a:rPr lang="de-DE"/>
+              <a:t>Pretty close to the metal, compared to languages like JavaScript or Python</a:t>
+            </a:r>
+          </a:p>
+          <a:p>
+            <a:pPr lvl="1">
+              <a:buFont typeface="Symbol" panose="05050102010706020507" pitchFamily="18" charset="2"/>
+              <a:buChar char="-"/>
+            </a:pPr>
+            <a:r>
+              <a:rPr lang="de-DE"/>
+              <a:t>„Low level“ language – Lots of memory stuff, pointers, etc.</a:t>
+            </a:r>
+          </a:p>
+        </p:txBody>
+      </p:sp>
+      <p:sp>
+        <p:nvSpPr>
+          <p:cNvPr id="3" name="Date Placeholder 2">
+            <a:extLst>
+              <a:ext uri="{FF2B5EF4-FFF2-40B4-BE49-F238E27FC236}">
+                <a16:creationId xmlns:a16="http://schemas.microsoft.com/office/drawing/2014/main" id="{9DE01C01-9E70-2E1A-9B1A-7F15EE30C2D7}"/>
+              </a:ext>
+            </a:extLst>
+          </p:cNvPr>
+          <p:cNvSpPr>
+            <a:spLocks noGrp="1"/>
+          </p:cNvSpPr>
+          <p:nvPr>
+            <p:ph type="dt" sz="half" idx="13"/>
+          </p:nvPr>
+        </p:nvSpPr>
+        <p:spPr/>
+        <p:txBody>
+          <a:bodyPr/>
+          <a:lstStyle/>
+          <a:p>
+            <a:fld id="{3156570E-7EF3-4182-BA9D-2A52B45C241A}" type="datetime1">
+              <a:rPr lang="de-DE" smtClean="0"/>
+              <a:t>21.10.2025</a:t>
+            </a:fld>
+            <a:endParaRPr lang="de-DE"/>
+          </a:p>
+        </p:txBody>
+      </p:sp>
+      <p:sp>
+        <p:nvSpPr>
+          <p:cNvPr id="4" name="Footer Placeholder 3">
+            <a:extLst>
+              <a:ext uri="{FF2B5EF4-FFF2-40B4-BE49-F238E27FC236}">
+                <a16:creationId xmlns:a16="http://schemas.microsoft.com/office/drawing/2014/main" id="{5A2D65DA-BCA3-66E6-A30A-0AD3B4AD46A1}"/>
+              </a:ext>
+            </a:extLst>
+          </p:cNvPr>
+          <p:cNvSpPr>
+            <a:spLocks noGrp="1"/>
+          </p:cNvSpPr>
+          <p:nvPr>
+            <p:ph type="ftr" sz="quarter" idx="14"/>
+          </p:nvPr>
+        </p:nvSpPr>
+        <p:spPr/>
+        <p:txBody>
+          <a:bodyPr/>
+          <a:lstStyle/>
+          <a:p>
+            <a:r>
+              <a:rPr lang="de-DE"/>
+              <a:t>RUSTikales Rust for beginners</a:t>
+            </a:r>
+          </a:p>
+        </p:txBody>
+      </p:sp>
+    </p:spTree>
+    <p:extLst>
+      <p:ext uri="{BB962C8B-B14F-4D97-AF65-F5344CB8AC3E}">
+        <p14:creationId xmlns:p14="http://schemas.microsoft.com/office/powerpoint/2010/main" val="2720550124"/>
+      </p:ext>
+    </p:extLst>
+  </p:cSld>
+  <p:clrMapOvr>
+    <a:masterClrMapping/>
+  </p:clrMapOvr>
+</p:sld>
+</file>
+
+<file path=ppt/slides/slide53.xml><?xml version="1.0" encoding="utf-8"?>
+<p:sld xmlns:a="http://schemas.openxmlformats.org/drawingml/2006/main" xmlns:r="http://schemas.openxmlformats.org/officeDocument/2006/relationships" xmlns:p="http://schemas.openxmlformats.org/presentationml/2006/main">
+  <p:cSld>
+    <p:spTree>
+      <p:nvGrpSpPr>
+        <p:cNvPr id="1" name="">
+          <a:extLst>
+            <a:ext uri="{FF2B5EF4-FFF2-40B4-BE49-F238E27FC236}">
+              <a16:creationId xmlns:a16="http://schemas.microsoft.com/office/drawing/2014/main" id="{10198190-8969-CD46-D43E-0325868EBBD6}"/>
+            </a:ext>
+          </a:extLst>
+        </p:cNvPr>
+        <p:cNvGrpSpPr/>
+        <p:nvPr/>
+      </p:nvGrpSpPr>
+      <p:grpSpPr>
+        <a:xfrm>
+          <a:off x="0" y="0"/>
+          <a:ext cx="0" cy="0"/>
+          <a:chOff x="0" y="0"/>
+          <a:chExt cx="0" cy="0"/>
+        </a:xfrm>
+      </p:grpSpPr>
+      <p:sp>
+        <p:nvSpPr>
+          <p:cNvPr id="5" name="Title 4">
+            <a:extLst>
+              <a:ext uri="{FF2B5EF4-FFF2-40B4-BE49-F238E27FC236}">
+                <a16:creationId xmlns:a16="http://schemas.microsoft.com/office/drawing/2014/main" id="{A13B6502-CCC4-2953-8E95-D0518BA493EC}"/>
+              </a:ext>
+            </a:extLst>
+          </p:cNvPr>
+          <p:cNvSpPr>
+            <a:spLocks noGrp="1"/>
+          </p:cNvSpPr>
+          <p:nvPr>
+            <p:ph type="title"/>
+          </p:nvPr>
+        </p:nvSpPr>
+        <p:spPr/>
+        <p:txBody>
+          <a:bodyPr/>
+          <a:lstStyle/>
+          <a:p>
+            <a:r>
+              <a:rPr lang="de-DE"/>
+              <a:t>Intermission – Intermissions</a:t>
+            </a:r>
+            <a:endParaRPr lang="de-DE" dirty="0"/>
+          </a:p>
+        </p:txBody>
+      </p:sp>
+      <p:sp>
+        <p:nvSpPr>
+          <p:cNvPr id="2" name="Text Placeholder 1">
+            <a:extLst>
+              <a:ext uri="{FF2B5EF4-FFF2-40B4-BE49-F238E27FC236}">
+                <a16:creationId xmlns:a16="http://schemas.microsoft.com/office/drawing/2014/main" id="{DCDE2869-EF6E-2E09-CF84-9C7580374E2D}"/>
+              </a:ext>
+            </a:extLst>
+          </p:cNvPr>
+          <p:cNvSpPr>
+            <a:spLocks noGrp="1"/>
+          </p:cNvSpPr>
+          <p:nvPr>
+            <p:ph type="body" idx="1"/>
+          </p:nvPr>
+        </p:nvSpPr>
+        <p:spPr/>
+        <p:txBody>
+          <a:bodyPr/>
+          <a:lstStyle/>
+          <a:p>
+            <a:pPr>
+              <a:buFont typeface="Symbol" panose="05050102010706020507" pitchFamily="18" charset="2"/>
+              <a:buChar char="-"/>
+            </a:pPr>
+            <a:r>
+              <a:rPr lang="de-DE"/>
+              <a:t>Rust is a system programming language</a:t>
+            </a:r>
+          </a:p>
+          <a:p>
+            <a:pPr lvl="1">
+              <a:buFont typeface="Symbol" panose="05050102010706020507" pitchFamily="18" charset="2"/>
+              <a:buChar char="-"/>
+            </a:pPr>
+            <a:r>
+              <a:rPr lang="de-DE"/>
+              <a:t>Pretty close to the metal, compared to languages like JavaScript or Python</a:t>
+            </a:r>
+          </a:p>
+          <a:p>
+            <a:pPr lvl="1">
+              <a:buFont typeface="Symbol" panose="05050102010706020507" pitchFamily="18" charset="2"/>
+              <a:buChar char="-"/>
+            </a:pPr>
+            <a:r>
+              <a:rPr lang="de-DE"/>
+              <a:t>„Low level“ language – Lots of memory stuff, pointers, etc.</a:t>
+            </a:r>
+          </a:p>
+          <a:p>
+            <a:pPr>
+              <a:buFont typeface="Symbol" panose="05050102010706020507" pitchFamily="18" charset="2"/>
+              <a:buChar char="-"/>
+            </a:pPr>
+            <a:r>
+              <a:rPr lang="de-DE"/>
+              <a:t>To better understand the language, </a:t>
+            </a:r>
+            <a:r>
+              <a:rPr lang="de-DE">
+                <a:solidFill>
+                  <a:srgbClr val="00FF00"/>
+                </a:solidFill>
+              </a:rPr>
+              <a:t>you need to understand the hardware</a:t>
+            </a:r>
+          </a:p>
+          <a:p>
+            <a:pPr lvl="1">
+              <a:buFont typeface="Symbol" panose="05050102010706020507" pitchFamily="18" charset="2"/>
+              <a:buChar char="-"/>
+            </a:pPr>
+            <a:r>
+              <a:rPr lang="de-DE"/>
+              <a:t>Intermissions will, at fitting points, </a:t>
+            </a:r>
+            <a:r>
+              <a:rPr lang="de-DE">
+                <a:solidFill>
+                  <a:srgbClr val="FFFF00"/>
+                </a:solidFill>
+              </a:rPr>
+              <a:t>introduce low level concepts </a:t>
+            </a:r>
+            <a:r>
+              <a:rPr lang="de-DE"/>
+              <a:t>to aid with that understanding</a:t>
+            </a:r>
+          </a:p>
+          <a:p>
+            <a:pPr lvl="2">
+              <a:buFont typeface="Symbol" panose="05050102010706020507" pitchFamily="18" charset="2"/>
+              <a:buChar char="-"/>
+            </a:pPr>
+            <a:r>
+              <a:rPr lang="de-DE"/>
+              <a:t>Functions </a:t>
+            </a:r>
+            <a:r>
+              <a:rPr lang="de-DE">
+                <a:sym typeface="Wingdings" panose="05000000000000000000" pitchFamily="2" charset="2"/>
+              </a:rPr>
+              <a:t> What is a </a:t>
+            </a:r>
+            <a:r>
+              <a:rPr lang="de-DE">
+                <a:solidFill>
+                  <a:srgbClr val="FFFF00"/>
+                </a:solidFill>
+                <a:sym typeface="Wingdings" panose="05000000000000000000" pitchFamily="2" charset="2"/>
+              </a:rPr>
+              <a:t>call stack</a:t>
+            </a:r>
+            <a:r>
+              <a:rPr lang="de-DE">
+                <a:sym typeface="Wingdings" panose="05000000000000000000" pitchFamily="2" charset="2"/>
+              </a:rPr>
+              <a:t>? What are </a:t>
+            </a:r>
+            <a:r>
+              <a:rPr lang="de-DE">
+                <a:solidFill>
+                  <a:srgbClr val="FF0000"/>
+                </a:solidFill>
+                <a:sym typeface="Wingdings" panose="05000000000000000000" pitchFamily="2" charset="2"/>
+              </a:rPr>
+              <a:t>dangling pointers</a:t>
+            </a:r>
+            <a:r>
+              <a:rPr lang="de-DE">
+                <a:sym typeface="Wingdings" panose="05000000000000000000" pitchFamily="2" charset="2"/>
+              </a:rPr>
+              <a:t>?</a:t>
+            </a:r>
+          </a:p>
+          <a:p>
+            <a:pPr lvl="2">
+              <a:buFont typeface="Symbol" panose="05050102010706020507" pitchFamily="18" charset="2"/>
+              <a:buChar char="-"/>
+            </a:pPr>
+            <a:r>
+              <a:rPr lang="de-DE">
+                <a:sym typeface="Wingdings" panose="05000000000000000000" pitchFamily="2" charset="2"/>
+              </a:rPr>
+              <a:t>Ownership  What is </a:t>
+            </a:r>
+            <a:r>
+              <a:rPr lang="de-DE">
+                <a:solidFill>
+                  <a:srgbClr val="FFFF00"/>
+                </a:solidFill>
+                <a:sym typeface="Wingdings" panose="05000000000000000000" pitchFamily="2" charset="2"/>
+              </a:rPr>
+              <a:t>memory safety</a:t>
+            </a:r>
+            <a:r>
+              <a:rPr lang="de-DE">
+                <a:sym typeface="Wingdings" panose="05000000000000000000" pitchFamily="2" charset="2"/>
+              </a:rPr>
+              <a:t> about?</a:t>
+            </a:r>
+            <a:endParaRPr lang="de-DE"/>
+          </a:p>
+        </p:txBody>
+      </p:sp>
+      <p:sp>
+        <p:nvSpPr>
+          <p:cNvPr id="3" name="Date Placeholder 2">
+            <a:extLst>
+              <a:ext uri="{FF2B5EF4-FFF2-40B4-BE49-F238E27FC236}">
+                <a16:creationId xmlns:a16="http://schemas.microsoft.com/office/drawing/2014/main" id="{05313DA3-11DF-8D33-458A-567D3569A93F}"/>
+              </a:ext>
+            </a:extLst>
+          </p:cNvPr>
+          <p:cNvSpPr>
+            <a:spLocks noGrp="1"/>
+          </p:cNvSpPr>
+          <p:nvPr>
+            <p:ph type="dt" sz="half" idx="13"/>
+          </p:nvPr>
+        </p:nvSpPr>
+        <p:spPr/>
+        <p:txBody>
+          <a:bodyPr/>
+          <a:lstStyle/>
+          <a:p>
+            <a:fld id="{3156570E-7EF3-4182-BA9D-2A52B45C241A}" type="datetime1">
+              <a:rPr lang="de-DE" smtClean="0"/>
+              <a:t>21.10.2025</a:t>
+            </a:fld>
+            <a:endParaRPr lang="de-DE"/>
+          </a:p>
+        </p:txBody>
+      </p:sp>
+      <p:sp>
+        <p:nvSpPr>
+          <p:cNvPr id="4" name="Footer Placeholder 3">
+            <a:extLst>
+              <a:ext uri="{FF2B5EF4-FFF2-40B4-BE49-F238E27FC236}">
+                <a16:creationId xmlns:a16="http://schemas.microsoft.com/office/drawing/2014/main" id="{DA393815-B719-85E7-19CB-DD8359048099}"/>
+              </a:ext>
+            </a:extLst>
+          </p:cNvPr>
+          <p:cNvSpPr>
+            <a:spLocks noGrp="1"/>
+          </p:cNvSpPr>
+          <p:nvPr>
+            <p:ph type="ftr" sz="quarter" idx="14"/>
+          </p:nvPr>
+        </p:nvSpPr>
+        <p:spPr/>
+        <p:txBody>
+          <a:bodyPr/>
+          <a:lstStyle/>
+          <a:p>
+            <a:r>
+              <a:rPr lang="de-DE"/>
+              <a:t>RUSTikales Rust for beginners</a:t>
+            </a:r>
+          </a:p>
+        </p:txBody>
+      </p:sp>
+    </p:spTree>
+    <p:extLst>
+      <p:ext uri="{BB962C8B-B14F-4D97-AF65-F5344CB8AC3E}">
+        <p14:creationId xmlns:p14="http://schemas.microsoft.com/office/powerpoint/2010/main" val="3391753453"/>
+      </p:ext>
+    </p:extLst>
+  </p:cSld>
+  <p:clrMapOvr>
+    <a:masterClrMapping/>
+  </p:clrMapOvr>
+</p:sld>
+</file>
+
+<file path=ppt/slides/slide54.xml><?xml version="1.0" encoding="utf-8"?>
+<p:sld xmlns:a="http://schemas.openxmlformats.org/drawingml/2006/main" xmlns:r="http://schemas.openxmlformats.org/officeDocument/2006/relationships" xmlns:p="http://schemas.openxmlformats.org/presentationml/2006/main">
+  <p:cSld>
+    <p:spTree>
+      <p:nvGrpSpPr>
+        <p:cNvPr id="1" name="">
+          <a:extLst>
+            <a:ext uri="{FF2B5EF4-FFF2-40B4-BE49-F238E27FC236}">
+              <a16:creationId xmlns:a16="http://schemas.microsoft.com/office/drawing/2014/main" id="{7927D820-A682-003B-7D7E-526A2EC27107}"/>
+            </a:ext>
+          </a:extLst>
+        </p:cNvPr>
+        <p:cNvGrpSpPr/>
+        <p:nvPr/>
+      </p:nvGrpSpPr>
+      <p:grpSpPr>
+        <a:xfrm>
+          <a:off x="0" y="0"/>
+          <a:ext cx="0" cy="0"/>
+          <a:chOff x="0" y="0"/>
+          <a:chExt cx="0" cy="0"/>
+        </a:xfrm>
+      </p:grpSpPr>
+      <p:sp>
+        <p:nvSpPr>
+          <p:cNvPr id="5" name="Title 4">
+            <a:extLst>
+              <a:ext uri="{FF2B5EF4-FFF2-40B4-BE49-F238E27FC236}">
+                <a16:creationId xmlns:a16="http://schemas.microsoft.com/office/drawing/2014/main" id="{E32D6C97-F1DC-F1E6-A28C-D84DC43B4DB9}"/>
+              </a:ext>
+            </a:extLst>
+          </p:cNvPr>
+          <p:cNvSpPr>
+            <a:spLocks noGrp="1"/>
+          </p:cNvSpPr>
+          <p:nvPr>
+            <p:ph type="title"/>
+          </p:nvPr>
+        </p:nvSpPr>
+        <p:spPr/>
+        <p:txBody>
+          <a:bodyPr/>
+          <a:lstStyle/>
+          <a:p>
+            <a:r>
+              <a:rPr lang="de-DE"/>
+              <a:t>Intermission – Intermissions</a:t>
+            </a:r>
+            <a:endParaRPr lang="de-DE" dirty="0"/>
+          </a:p>
+        </p:txBody>
+      </p:sp>
+      <p:sp>
+        <p:nvSpPr>
+          <p:cNvPr id="2" name="Text Placeholder 1">
+            <a:extLst>
+              <a:ext uri="{FF2B5EF4-FFF2-40B4-BE49-F238E27FC236}">
+                <a16:creationId xmlns:a16="http://schemas.microsoft.com/office/drawing/2014/main" id="{5C74D9F2-8F88-2800-6575-E19B938803CC}"/>
+              </a:ext>
+            </a:extLst>
+          </p:cNvPr>
+          <p:cNvSpPr>
+            <a:spLocks noGrp="1"/>
+          </p:cNvSpPr>
+          <p:nvPr>
+            <p:ph type="body" idx="1"/>
+          </p:nvPr>
+        </p:nvSpPr>
+        <p:spPr/>
+        <p:txBody>
+          <a:bodyPr/>
+          <a:lstStyle/>
+          <a:p>
+            <a:pPr>
+              <a:buFont typeface="Symbol" panose="05050102010706020507" pitchFamily="18" charset="2"/>
+              <a:buChar char="-"/>
+            </a:pPr>
+            <a:r>
+              <a:rPr lang="de-DE"/>
+              <a:t>Rust is a system programming language</a:t>
+            </a:r>
+          </a:p>
+          <a:p>
+            <a:pPr lvl="1">
+              <a:buFont typeface="Symbol" panose="05050102010706020507" pitchFamily="18" charset="2"/>
+              <a:buChar char="-"/>
+            </a:pPr>
+            <a:r>
+              <a:rPr lang="de-DE"/>
+              <a:t>Pretty close to the metal, compared to languages like JavaScript or Python</a:t>
+            </a:r>
+          </a:p>
+          <a:p>
+            <a:pPr lvl="1">
+              <a:buFont typeface="Symbol" panose="05050102010706020507" pitchFamily="18" charset="2"/>
+              <a:buChar char="-"/>
+            </a:pPr>
+            <a:r>
+              <a:rPr lang="de-DE"/>
+              <a:t>„Low level“ language – Lots of memory stuff, pointers, etc.</a:t>
+            </a:r>
+          </a:p>
+          <a:p>
+            <a:pPr>
+              <a:buFont typeface="Symbol" panose="05050102010706020507" pitchFamily="18" charset="2"/>
+              <a:buChar char="-"/>
+            </a:pPr>
+            <a:r>
+              <a:rPr lang="de-DE"/>
+              <a:t>To better understand the language, </a:t>
+            </a:r>
+            <a:r>
+              <a:rPr lang="de-DE">
+                <a:solidFill>
+                  <a:srgbClr val="00FF00"/>
+                </a:solidFill>
+              </a:rPr>
+              <a:t>you need to understand the hardware</a:t>
+            </a:r>
+          </a:p>
+          <a:p>
+            <a:pPr lvl="1">
+              <a:buFont typeface="Symbol" panose="05050102010706020507" pitchFamily="18" charset="2"/>
+              <a:buChar char="-"/>
+            </a:pPr>
+            <a:r>
+              <a:rPr lang="de-DE"/>
+              <a:t>Intermissions will, at fitting points, </a:t>
+            </a:r>
+            <a:r>
+              <a:rPr lang="de-DE">
+                <a:solidFill>
+                  <a:srgbClr val="FFFF00"/>
+                </a:solidFill>
+              </a:rPr>
+              <a:t>introduce low level concepts </a:t>
+            </a:r>
+            <a:r>
+              <a:rPr lang="de-DE"/>
+              <a:t>to aid with that understanding</a:t>
+            </a:r>
+          </a:p>
+          <a:p>
+            <a:pPr lvl="2">
+              <a:buFont typeface="Symbol" panose="05050102010706020507" pitchFamily="18" charset="2"/>
+              <a:buChar char="-"/>
+            </a:pPr>
+            <a:r>
+              <a:rPr lang="de-DE"/>
+              <a:t>Functions </a:t>
+            </a:r>
+            <a:r>
+              <a:rPr lang="de-DE">
+                <a:sym typeface="Wingdings" panose="05000000000000000000" pitchFamily="2" charset="2"/>
+              </a:rPr>
+              <a:t> What is a </a:t>
+            </a:r>
+            <a:r>
+              <a:rPr lang="de-DE">
+                <a:solidFill>
+                  <a:srgbClr val="FFFF00"/>
+                </a:solidFill>
+                <a:sym typeface="Wingdings" panose="05000000000000000000" pitchFamily="2" charset="2"/>
+              </a:rPr>
+              <a:t>call stack</a:t>
+            </a:r>
+            <a:r>
+              <a:rPr lang="de-DE">
+                <a:sym typeface="Wingdings" panose="05000000000000000000" pitchFamily="2" charset="2"/>
+              </a:rPr>
+              <a:t>? What are </a:t>
+            </a:r>
+            <a:r>
+              <a:rPr lang="de-DE">
+                <a:solidFill>
+                  <a:srgbClr val="FF0000"/>
+                </a:solidFill>
+                <a:sym typeface="Wingdings" panose="05000000000000000000" pitchFamily="2" charset="2"/>
+              </a:rPr>
+              <a:t>dangling pointers</a:t>
+            </a:r>
+            <a:r>
+              <a:rPr lang="de-DE">
+                <a:sym typeface="Wingdings" panose="05000000000000000000" pitchFamily="2" charset="2"/>
+              </a:rPr>
+              <a:t>?</a:t>
+            </a:r>
+          </a:p>
+          <a:p>
+            <a:pPr lvl="2">
+              <a:buFont typeface="Symbol" panose="05050102010706020507" pitchFamily="18" charset="2"/>
+              <a:buChar char="-"/>
+            </a:pPr>
+            <a:r>
+              <a:rPr lang="de-DE">
+                <a:sym typeface="Wingdings" panose="05000000000000000000" pitchFamily="2" charset="2"/>
+              </a:rPr>
+              <a:t>Ownership  What is </a:t>
+            </a:r>
+            <a:r>
+              <a:rPr lang="de-DE">
+                <a:solidFill>
+                  <a:srgbClr val="FFFF00"/>
+                </a:solidFill>
+                <a:sym typeface="Wingdings" panose="05000000000000000000" pitchFamily="2" charset="2"/>
+              </a:rPr>
+              <a:t>memory safety</a:t>
+            </a:r>
+            <a:r>
+              <a:rPr lang="de-DE">
+                <a:sym typeface="Wingdings" panose="05000000000000000000" pitchFamily="2" charset="2"/>
+              </a:rPr>
+              <a:t> about?</a:t>
+            </a:r>
+          </a:p>
+          <a:p>
+            <a:pPr>
+              <a:buFont typeface="Symbol" panose="05050102010706020507" pitchFamily="18" charset="2"/>
+              <a:buChar char="-"/>
+            </a:pPr>
+            <a:r>
+              <a:rPr lang="de-DE">
+                <a:sym typeface="Wingdings" panose="05000000000000000000" pitchFamily="2" charset="2"/>
+              </a:rPr>
+              <a:t>Intermissions will also introduce some </a:t>
+            </a:r>
+            <a:r>
+              <a:rPr lang="de-DE">
+                <a:solidFill>
+                  <a:srgbClr val="00FF00"/>
+                </a:solidFill>
+                <a:sym typeface="Wingdings" panose="05000000000000000000" pitchFamily="2" charset="2"/>
+              </a:rPr>
+              <a:t>concepts that don‘t fit into the topic at hand</a:t>
+            </a:r>
+          </a:p>
+          <a:p>
+            <a:pPr lvl="1">
+              <a:buFont typeface="Symbol" panose="05050102010706020507" pitchFamily="18" charset="2"/>
+              <a:buChar char="-"/>
+            </a:pPr>
+            <a:r>
+              <a:rPr lang="de-DE">
+                <a:sym typeface="Wingdings" panose="05000000000000000000" pitchFamily="2" charset="2"/>
+              </a:rPr>
+              <a:t>How do </a:t>
+            </a:r>
+            <a:r>
+              <a:rPr lang="de-DE">
+                <a:solidFill>
+                  <a:srgbClr val="FFFF00"/>
+                </a:solidFill>
+                <a:sym typeface="Wingdings" panose="05000000000000000000" pitchFamily="2" charset="2"/>
+              </a:rPr>
+              <a:t>floating point numbers</a:t>
+            </a:r>
+            <a:r>
+              <a:rPr lang="de-DE">
+                <a:sym typeface="Wingdings" panose="05000000000000000000" pitchFamily="2" charset="2"/>
+              </a:rPr>
+              <a:t> work?</a:t>
+            </a:r>
+          </a:p>
+          <a:p>
+            <a:pPr lvl="1">
+              <a:buFont typeface="Symbol" panose="05050102010706020507" pitchFamily="18" charset="2"/>
+              <a:buChar char="-"/>
+            </a:pPr>
+            <a:r>
+              <a:rPr lang="de-DE">
+                <a:sym typeface="Wingdings" panose="05000000000000000000" pitchFamily="2" charset="2"/>
+              </a:rPr>
+              <a:t>What are </a:t>
+            </a:r>
+            <a:r>
+              <a:rPr lang="de-DE">
+                <a:solidFill>
+                  <a:srgbClr val="FFFF00"/>
+                </a:solidFill>
+                <a:sym typeface="Wingdings" panose="05000000000000000000" pitchFamily="2" charset="2"/>
+              </a:rPr>
+              <a:t>Strings</a:t>
+            </a:r>
+            <a:r>
+              <a:rPr lang="de-DE">
+                <a:sym typeface="Wingdings" panose="05000000000000000000" pitchFamily="2" charset="2"/>
+              </a:rPr>
+              <a:t>? What is </a:t>
+            </a:r>
+            <a:r>
+              <a:rPr lang="de-DE">
+                <a:solidFill>
+                  <a:srgbClr val="FFFF00"/>
+                </a:solidFill>
+                <a:sym typeface="Wingdings" panose="05000000000000000000" pitchFamily="2" charset="2"/>
+              </a:rPr>
+              <a:t>format!() </a:t>
+            </a:r>
+            <a:r>
+              <a:rPr lang="de-DE">
+                <a:sym typeface="Wingdings" panose="05000000000000000000" pitchFamily="2" charset="2"/>
+              </a:rPr>
+              <a:t>and </a:t>
+            </a:r>
+            <a:r>
+              <a:rPr lang="de-DE">
+                <a:solidFill>
+                  <a:srgbClr val="FFFF00"/>
+                </a:solidFill>
+                <a:sym typeface="Wingdings" panose="05000000000000000000" pitchFamily="2" charset="2"/>
+              </a:rPr>
+              <a:t>println!()</a:t>
+            </a:r>
+            <a:r>
+              <a:rPr lang="de-DE">
+                <a:sym typeface="Wingdings" panose="05000000000000000000" pitchFamily="2" charset="2"/>
+              </a:rPr>
+              <a:t>?</a:t>
+            </a:r>
+          </a:p>
+          <a:p>
+            <a:pPr lvl="1">
+              <a:buFont typeface="Symbol" panose="05050102010706020507" pitchFamily="18" charset="2"/>
+              <a:buChar char="-"/>
+            </a:pPr>
+            <a:r>
+              <a:rPr lang="de-DE">
+                <a:sym typeface="Wingdings" panose="05000000000000000000" pitchFamily="2" charset="2"/>
+              </a:rPr>
+              <a:t>Goal: Learn </a:t>
+            </a:r>
+            <a:r>
+              <a:rPr lang="de-DE">
+                <a:solidFill>
+                  <a:srgbClr val="FFFF00"/>
+                </a:solidFill>
+                <a:sym typeface="Wingdings" panose="05000000000000000000" pitchFamily="2" charset="2"/>
+              </a:rPr>
+              <a:t>concepts that transcend Rust </a:t>
+            </a:r>
+            <a:r>
+              <a:rPr lang="de-DE">
+                <a:sym typeface="Wingdings" panose="05000000000000000000" pitchFamily="2" charset="2"/>
+              </a:rPr>
+              <a:t>and are </a:t>
+            </a:r>
+            <a:r>
+              <a:rPr lang="de-DE">
+                <a:solidFill>
+                  <a:srgbClr val="FFFF00"/>
+                </a:solidFill>
+                <a:sym typeface="Wingdings" panose="05000000000000000000" pitchFamily="2" charset="2"/>
+              </a:rPr>
+              <a:t>applicable to other languages</a:t>
+            </a:r>
+            <a:endParaRPr lang="de-DE">
+              <a:sym typeface="Wingdings" panose="05000000000000000000" pitchFamily="2" charset="2"/>
+            </a:endParaRPr>
+          </a:p>
+        </p:txBody>
+      </p:sp>
+      <p:sp>
+        <p:nvSpPr>
+          <p:cNvPr id="3" name="Date Placeholder 2">
+            <a:extLst>
+              <a:ext uri="{FF2B5EF4-FFF2-40B4-BE49-F238E27FC236}">
+                <a16:creationId xmlns:a16="http://schemas.microsoft.com/office/drawing/2014/main" id="{09F33803-F73D-F2E5-FA9F-32F0F0BDF5E7}"/>
+              </a:ext>
+            </a:extLst>
+          </p:cNvPr>
+          <p:cNvSpPr>
+            <a:spLocks noGrp="1"/>
+          </p:cNvSpPr>
+          <p:nvPr>
+            <p:ph type="dt" sz="half" idx="13"/>
+          </p:nvPr>
+        </p:nvSpPr>
+        <p:spPr/>
+        <p:txBody>
+          <a:bodyPr/>
+          <a:lstStyle/>
+          <a:p>
+            <a:fld id="{3156570E-7EF3-4182-BA9D-2A52B45C241A}" type="datetime1">
+              <a:rPr lang="de-DE" smtClean="0"/>
+              <a:t>21.10.2025</a:t>
+            </a:fld>
+            <a:endParaRPr lang="de-DE"/>
+          </a:p>
+        </p:txBody>
+      </p:sp>
+      <p:sp>
+        <p:nvSpPr>
+          <p:cNvPr id="4" name="Footer Placeholder 3">
+            <a:extLst>
+              <a:ext uri="{FF2B5EF4-FFF2-40B4-BE49-F238E27FC236}">
+                <a16:creationId xmlns:a16="http://schemas.microsoft.com/office/drawing/2014/main" id="{5423DD71-E150-BB93-6A8C-3FE2C6301E7E}"/>
+              </a:ext>
+            </a:extLst>
+          </p:cNvPr>
+          <p:cNvSpPr>
+            <a:spLocks noGrp="1"/>
+          </p:cNvSpPr>
+          <p:nvPr>
+            <p:ph type="ftr" sz="quarter" idx="14"/>
+          </p:nvPr>
+        </p:nvSpPr>
+        <p:spPr/>
+        <p:txBody>
+          <a:bodyPr/>
+          <a:lstStyle/>
+          <a:p>
+            <a:r>
+              <a:rPr lang="de-DE"/>
+              <a:t>RUSTikales Rust for beginners</a:t>
+            </a:r>
+          </a:p>
+        </p:txBody>
+      </p:sp>
+    </p:spTree>
+    <p:extLst>
+      <p:ext uri="{BB962C8B-B14F-4D97-AF65-F5344CB8AC3E}">
+        <p14:creationId xmlns:p14="http://schemas.microsoft.com/office/powerpoint/2010/main" val="1696898615"/>
+      </p:ext>
+    </p:extLst>
+  </p:cSld>
+  <p:clrMapOvr>
+    <a:masterClrMapping/>
+  </p:clrMapOvr>
+</p:sld>
+</file>
+
+<file path=ppt/slides/slide55.xml><?xml version="1.0" encoding="utf-8"?>
+<p:sld xmlns:a="http://schemas.openxmlformats.org/drawingml/2006/main" xmlns:r="http://schemas.openxmlformats.org/officeDocument/2006/relationships" xmlns:p="http://schemas.openxmlformats.org/presentationml/2006/main">
+  <p:cSld>
+    <p:spTree>
+      <p:nvGrpSpPr>
         <p:cNvPr id="1" name=""/>
         <p:cNvGrpSpPr/>
         <p:nvPr/>
